--- a/public/retrieval-cops-and-robbers-template.pptx
+++ b/public/retrieval-cops-and-robbers-template.pptx
@@ -2,13 +2,13 @@
 <file path=ppt/presentation.xml><?xml version="1.0" encoding="utf-8"?>
 <p:presentation xmlns:p="http://schemas.openxmlformats.org/presentationml/2006/main">
   <p:sldMasterIdLst>
-    <p:sldMasterId xmlns:r="http://schemas.openxmlformats.org/officeDocument/2006/relationships" id="2147483648" r:id="Re16d5d9c0d6046f0"/>
+    <p:sldMasterId xmlns:r="http://schemas.openxmlformats.org/officeDocument/2006/relationships" id="2147483648" r:id="Ra3b56c5049a1443d"/>
   </p:sldMasterIdLst>
   <p:notesMasterIdLst>
-    <p:notesMasterId xmlns:r="http://schemas.openxmlformats.org/officeDocument/2006/relationships" r:id="R1f806519b72a4018"/>
+    <p:notesMasterId xmlns:r="http://schemas.openxmlformats.org/officeDocument/2006/relationships" r:id="R3ea3ed2e07b14d2e"/>
   </p:notesMasterIdLst>
   <p:sldIdLst>
-    <p:sldId xmlns:r="http://schemas.openxmlformats.org/officeDocument/2006/relationships" id="256" r:id="R8c395129a21540ef"/>
+    <p:sldId xmlns:r="http://schemas.openxmlformats.org/officeDocument/2006/relationships" id="256" r:id="R726842be85274e68"/>
   </p:sldIdLst>
   <p:sldSz cx="12192000" cy="6858000"/>
   <p:notesSz cx="6858000" cy="9144000"/>
@@ -442,7 +442,7 @@
           <a:lstStyle xmlns:a="http://schemas.openxmlformats.org/drawingml/2006/main"/>
           <a:p xmlns:a="http://schemas.openxmlformats.org/drawingml/2006/main">
             <a:r>
-              <a:t>Teacher setup: Replace bracketed text before teaching. Every text box is editable. Duplicate the slide for checked answers or a second prompt. Keep prompt and answer sides separate when printing cards.</a:t>
+              <a:t>Teacher setup: Replace bracketed text before teaching. All text and shapes are editable. Duplicate the slide for answers or another prompt. For card activities, separate prompt and answer sides before printing.</a:t>
             </a:r>
           </a:p>
           <a:p xmlns:a="http://schemas.openxmlformats.org/drawingml/2006/main">
@@ -452,17 +452,12 @@
           </a:p>
           <a:p xmlns:a="http://schemas.openxmlformats.org/drawingml/2006/main">
             <a:r>
-              <a:t>Activity: Cops and robbers</a:t>
-            </a:r>
-          </a:p>
-          <a:p xmlns:a="http://schemas.openxmlformats.org/drawingml/2006/main">
-            <a:r>
               <a:t>Materials: Paper split into “My recall” and “From peers”</a:t>
             </a:r>
           </a:p>
           <a:p xmlns:a="http://schemas.openxmlformats.org/drawingml/2006/main">
             <a:r>
-              <a:t>Suggested total time including feedback: 8 minutes.</a:t>
+              <a:t>Suggested time including feedback: 8 minutes.</a:t>
             </a:r>
           </a:p>
           <a:p xmlns:a="http://schemas.openxmlformats.org/drawingml/2006/main">
@@ -505,26 +500,6 @@
               <a:t>Adapt: Use fixed pairs instead of movement, and headings to support a narrower focus.</a:t>
             </a:r>
           </a:p>
-          <a:p xmlns:a="http://schemas.openxmlformats.org/drawingml/2006/main">
-            <a:r>
-              <a:t>Credit: Kate Jones — published classroom resource</a:t>
-            </a:r>
-          </a:p>
-          <a:p xmlns:a="http://schemas.openxmlformats.org/drawingml/2006/main">
-            <a:r>
-              <a:t>Jones describes this activity in her retrieval practice resources. This is a TNT classroom adaptation with seated sharing and teacher verification.</a:t>
-            </a:r>
-          </a:p>
-          <a:p xmlns:a="http://schemas.openxmlformats.org/drawingml/2006/main">
-            <a:r>
-              <a:t>Source: https://tile.psy.gla.ac.uk/2019/12/03/tile-share-best-practice-retrieval-practice-research-and-resources-for-every-classroom-by-kate-jones/</a:t>
-            </a:r>
-          </a:p>
-          <a:p xmlns:a="http://schemas.openxmlformats.org/drawingml/2006/main">
-            <a:r>
-              <a:t>Full guide: https://tnt-teaching-tools.github.io/cold-call-classroom/retrieval-cops-and-robbers.html</a:t>
-            </a:r>
-          </a:p>
         </p:txBody>
       </p:sp>
       <p:sp>
@@ -569,7 +544,7 @@
           <p:cNvPr id="4" name="Accent rule">
             <a:extLst xmlns:a="http://schemas.openxmlformats.org/drawingml/2006/main">
               <a:ext uri="{FF2B5EF4-FFF2-40B4-BE49-F238E27FC236}">
-                <a16:creationId xmlns:a16="http://schemas.microsoft.com/office/drawing/2014/main" id="{FC4F7229-AA1E-469B-AD65-7E20C5D1B227}"/>
+                <a16:creationId xmlns:a16="http://schemas.microsoft.com/office/drawing/2014/main" id="{5D095150-8588-43A9-B175-1EEC5BC0ED7D}"/>
               </a:ext>
             </a:extLst>
           </p:cNvPr>
@@ -600,7 +575,7 @@
           <p:cNvPr id="2" name="Title">
             <a:extLst xmlns:a="http://schemas.openxmlformats.org/drawingml/2006/main">
               <a:ext uri="{FF2B5EF4-FFF2-40B4-BE49-F238E27FC236}">
-                <a16:creationId xmlns:a16="http://schemas.microsoft.com/office/drawing/2014/main" id="{E21DF5D7-700C-4C4E-978C-9FD0993F2008}"/>
+                <a16:creationId xmlns:a16="http://schemas.microsoft.com/office/drawing/2014/main" id="{3D266528-AFF5-40EF-939A-582193697233}"/>
               </a:ext>
             </a:extLst>
           </p:cNvPr>
@@ -747,7 +722,7 @@
           <p:cNvPr id="3" name="Subtitle">
             <a:extLst xmlns:a="http://schemas.openxmlformats.org/drawingml/2006/main">
               <a:ext uri="{FF2B5EF4-FFF2-40B4-BE49-F238E27FC236}">
-                <a16:creationId xmlns:a16="http://schemas.microsoft.com/office/drawing/2014/main" id="{728BBE74-E523-44ED-9628-6CE735BD563F}"/>
+                <a16:creationId xmlns:a16="http://schemas.microsoft.com/office/drawing/2014/main" id="{6A2ED4E5-5563-41AA-A925-50A65E6EC27A}"/>
               </a:ext>
             </a:extLst>
           </p:cNvPr>
@@ -911,7 +886,7 @@
           <p:cNvPr id="3" name="Accent rule">
             <a:extLst xmlns:a="http://schemas.openxmlformats.org/drawingml/2006/main">
               <a:ext uri="{FF2B5EF4-FFF2-40B4-BE49-F238E27FC236}">
-                <a16:creationId xmlns:a16="http://schemas.microsoft.com/office/drawing/2014/main" id="{7CC14240-4485-46C7-BE41-DE725C26510D}"/>
+                <a16:creationId xmlns:a16="http://schemas.microsoft.com/office/drawing/2014/main" id="{C5A25322-23CF-4029-A93E-0713096490C8}"/>
               </a:ext>
             </a:extLst>
           </p:cNvPr>
@@ -942,7 +917,7 @@
           <p:cNvPr id="2" name="Section title">
             <a:extLst xmlns:a="http://schemas.openxmlformats.org/drawingml/2006/main">
               <a:ext uri="{FF2B5EF4-FFF2-40B4-BE49-F238E27FC236}">
-                <a16:creationId xmlns:a16="http://schemas.microsoft.com/office/drawing/2014/main" id="{B31DD321-6204-4C86-BE6F-F9E79E2D4ABB}"/>
+                <a16:creationId xmlns:a16="http://schemas.microsoft.com/office/drawing/2014/main" id="{0D4766D4-1A35-4A9D-ADBA-7E6E0F2A2F97}"/>
               </a:ext>
             </a:extLst>
           </p:cNvPr>
@@ -1106,7 +1081,7 @@
           <p:cNvPr id="4" name="Accent rule">
             <a:extLst xmlns:a="http://schemas.openxmlformats.org/drawingml/2006/main">
               <a:ext uri="{FF2B5EF4-FFF2-40B4-BE49-F238E27FC236}">
-                <a16:creationId xmlns:a16="http://schemas.microsoft.com/office/drawing/2014/main" id="{60632E98-D0A2-430B-8592-9DD0684DEF80}"/>
+                <a16:creationId xmlns:a16="http://schemas.microsoft.com/office/drawing/2014/main" id="{CB03CD68-C95E-4464-BAB2-540923DBBE82}"/>
               </a:ext>
             </a:extLst>
           </p:cNvPr>
@@ -1137,7 +1112,7 @@
           <p:cNvPr id="2" name="Title">
             <a:extLst xmlns:a="http://schemas.openxmlformats.org/drawingml/2006/main">
               <a:ext uri="{FF2B5EF4-FFF2-40B4-BE49-F238E27FC236}">
-                <a16:creationId xmlns:a16="http://schemas.microsoft.com/office/drawing/2014/main" id="{DE2087AB-2B58-4BC5-AD57-EC233BB649BE}"/>
+                <a16:creationId xmlns:a16="http://schemas.microsoft.com/office/drawing/2014/main" id="{1D35ED26-71F3-40CE-BAD5-6488DBE7EB84}"/>
               </a:ext>
             </a:extLst>
           </p:cNvPr>
@@ -1284,7 +1259,7 @@
           <p:cNvPr id="3" name="Body">
             <a:extLst xmlns:a="http://schemas.openxmlformats.org/drawingml/2006/main">
               <a:ext uri="{FF2B5EF4-FFF2-40B4-BE49-F238E27FC236}">
-                <a16:creationId xmlns:a16="http://schemas.microsoft.com/office/drawing/2014/main" id="{9008A426-91A3-4FBC-8C83-84FF1CFE584A}"/>
+                <a16:creationId xmlns:a16="http://schemas.microsoft.com/office/drawing/2014/main" id="{B9485D96-0DAF-40F9-8505-C4AC0DB1933A}"/>
               </a:ext>
             </a:extLst>
           </p:cNvPr>
@@ -1448,7 +1423,7 @@
           <p:cNvPr id="5" name="Accent rule">
             <a:extLst xmlns:a="http://schemas.openxmlformats.org/drawingml/2006/main">
               <a:ext uri="{FF2B5EF4-FFF2-40B4-BE49-F238E27FC236}">
-                <a16:creationId xmlns:a16="http://schemas.microsoft.com/office/drawing/2014/main" id="{73B433EB-9B5D-4B30-9ED9-A96CC7A63DB2}"/>
+                <a16:creationId xmlns:a16="http://schemas.microsoft.com/office/drawing/2014/main" id="{7F0E52F1-4C5C-4FA5-9F08-47BF2D0618DB}"/>
               </a:ext>
             </a:extLst>
           </p:cNvPr>
@@ -1479,7 +1454,7 @@
           <p:cNvPr id="2" name="Title">
             <a:extLst xmlns:a="http://schemas.openxmlformats.org/drawingml/2006/main">
               <a:ext uri="{FF2B5EF4-FFF2-40B4-BE49-F238E27FC236}">
-                <a16:creationId xmlns:a16="http://schemas.microsoft.com/office/drawing/2014/main" id="{8DBFBD01-90AF-402B-98D6-5B0ECD27DDB8}"/>
+                <a16:creationId xmlns:a16="http://schemas.microsoft.com/office/drawing/2014/main" id="{3879A532-9169-4ECB-A30E-B870B7487B2F}"/>
               </a:ext>
             </a:extLst>
           </p:cNvPr>
@@ -1626,7 +1601,7 @@
           <p:cNvPr id="3" name="Left column">
             <a:extLst xmlns:a="http://schemas.openxmlformats.org/drawingml/2006/main">
               <a:ext uri="{FF2B5EF4-FFF2-40B4-BE49-F238E27FC236}">
-                <a16:creationId xmlns:a16="http://schemas.microsoft.com/office/drawing/2014/main" id="{EA3C1C0E-9ACD-4030-963C-431C3631687A}"/>
+                <a16:creationId xmlns:a16="http://schemas.microsoft.com/office/drawing/2014/main" id="{D307C048-7DB8-4B47-8D58-5CA30642D458}"/>
               </a:ext>
             </a:extLst>
           </p:cNvPr>
@@ -1773,7 +1748,7 @@
           <p:cNvPr id="4" name="Right column">
             <a:extLst xmlns:a="http://schemas.openxmlformats.org/drawingml/2006/main">
               <a:ext uri="{FF2B5EF4-FFF2-40B4-BE49-F238E27FC236}">
-                <a16:creationId xmlns:a16="http://schemas.microsoft.com/office/drawing/2014/main" id="{5228DF26-386F-4278-A72F-36903162B51C}"/>
+                <a16:creationId xmlns:a16="http://schemas.microsoft.com/office/drawing/2014/main" id="{1AF6ECFE-D2B8-4F4B-950C-F736B1E6F645}"/>
               </a:ext>
             </a:extLst>
           </p:cNvPr>
@@ -1937,7 +1912,7 @@
           <p:cNvPr id="4" name="Accent rule">
             <a:extLst xmlns:a="http://schemas.openxmlformats.org/drawingml/2006/main">
               <a:ext uri="{FF2B5EF4-FFF2-40B4-BE49-F238E27FC236}">
-                <a16:creationId xmlns:a16="http://schemas.microsoft.com/office/drawing/2014/main" id="{B9C937C2-5527-4288-A9C7-80899430150D}"/>
+                <a16:creationId xmlns:a16="http://schemas.microsoft.com/office/drawing/2014/main" id="{1FA587A7-8C55-4C11-91D5-A4F12FE92508}"/>
               </a:ext>
             </a:extLst>
           </p:cNvPr>
@@ -1968,7 +1943,7 @@
           <p:cNvPr id="2" name="Title">
             <a:extLst xmlns:a="http://schemas.openxmlformats.org/drawingml/2006/main">
               <a:ext uri="{FF2B5EF4-FFF2-40B4-BE49-F238E27FC236}">
-                <a16:creationId xmlns:a16="http://schemas.microsoft.com/office/drawing/2014/main" id="{AF73ABCE-6FBE-4AE9-A21B-AE82BC8D7937}"/>
+                <a16:creationId xmlns:a16="http://schemas.microsoft.com/office/drawing/2014/main" id="{DC2FB292-1982-4412-B515-FC2F55A90549}"/>
               </a:ext>
             </a:extLst>
           </p:cNvPr>
@@ -2115,7 +2090,7 @@
           <p:cNvPr id="3" name="Left column">
             <a:extLst xmlns:a="http://schemas.openxmlformats.org/drawingml/2006/main">
               <a:ext uri="{FF2B5EF4-FFF2-40B4-BE49-F238E27FC236}">
-                <a16:creationId xmlns:a16="http://schemas.microsoft.com/office/drawing/2014/main" id="{57E01FF3-DDF2-457A-AFB0-165B2C4F539C}"/>
+                <a16:creationId xmlns:a16="http://schemas.microsoft.com/office/drawing/2014/main" id="{4E510BB5-6E20-4595-802D-803AA79E18BF}"/>
               </a:ext>
             </a:extLst>
           </p:cNvPr>
@@ -2300,12 +2275,12 @@
   </p:cSld>
   <p:clrMap bg1="lt1" tx1="dk1" bg2="lt2" tx2="dk2" accent1="accent1" accent2="accent2" accent3="accent3" accent4="accent4" accent5="accent5" accent6="accent6" hlink="hlink" folHlink="folHlink"/>
   <p:sldLayoutIdLst>
-    <p:sldLayoutId xmlns:r="http://schemas.openxmlformats.org/officeDocument/2006/relationships" id="2147483649" r:id="Rb07bb4a435c8449c"/>
-    <p:sldLayoutId xmlns:r="http://schemas.openxmlformats.org/officeDocument/2006/relationships" id="2147483650" r:id="R4e13ca5911254171"/>
-    <p:sldLayoutId xmlns:r="http://schemas.openxmlformats.org/officeDocument/2006/relationships" id="2147483651" r:id="R6435e5dd1f6c4501"/>
-    <p:sldLayoutId xmlns:r="http://schemas.openxmlformats.org/officeDocument/2006/relationships" id="2147483652" r:id="R7d3c19683f3945c7"/>
-    <p:sldLayoutId xmlns:r="http://schemas.openxmlformats.org/officeDocument/2006/relationships" id="2147483653" r:id="R44ffae8eb55648fe"/>
-    <p:sldLayoutId xmlns:r="http://schemas.openxmlformats.org/officeDocument/2006/relationships" id="2147483654" r:id="R535f7f937b9c46a6"/>
+    <p:sldLayoutId xmlns:r="http://schemas.openxmlformats.org/officeDocument/2006/relationships" id="2147483649" r:id="Rc8080f5f1b1740ed"/>
+    <p:sldLayoutId xmlns:r="http://schemas.openxmlformats.org/officeDocument/2006/relationships" id="2147483650" r:id="R4cec55f819644d6e"/>
+    <p:sldLayoutId xmlns:r="http://schemas.openxmlformats.org/officeDocument/2006/relationships" id="2147483651" r:id="R95724c545ba14b53"/>
+    <p:sldLayoutId xmlns:r="http://schemas.openxmlformats.org/officeDocument/2006/relationships" id="2147483652" r:id="R0bb85c5a45d845eb"/>
+    <p:sldLayoutId xmlns:r="http://schemas.openxmlformats.org/officeDocument/2006/relationships" id="2147483653" r:id="R7c45d2779e28412f"/>
+    <p:sldLayoutId xmlns:r="http://schemas.openxmlformats.org/officeDocument/2006/relationships" id="2147483654" r:id="R1d0c73e5e1b24c13"/>
   </p:sldLayoutIdLst>
   <p:txStyles>
     <p:titleStyle>
@@ -2838,7 +2813,7 @@
     <p:bg>
       <p:bgPr>
         <a:solidFill xmlns:a="http://schemas.openxmlformats.org/drawingml/2006/main">
-          <a:srgbClr val="FFFCF2"/>
+          <a:srgbClr val="FFFDF5"/>
         </a:solidFill>
       </p:bgPr>
     </p:bg>
@@ -2853,10 +2828,10 @@
       </p:grpSpPr>
       <p:sp>
         <p:nvSpPr>
-          <p:cNvPr id="8" name="">
+          <p:cNvPr id="19" name="">
             <a:extLst xmlns:a="http://schemas.openxmlformats.org/drawingml/2006/main">
               <a:ext uri="{FF2B5EF4-FFF2-40B4-BE49-F238E27FC236}">
-                <a16:creationId xmlns:a16="http://schemas.microsoft.com/office/drawing/2014/main" id="{53191CD3-F955-4302-A81D-B675F0066A62}"/>
+                <a16:creationId xmlns:a16="http://schemas.microsoft.com/office/drawing/2014/main" id="{7EEC18E1-15AF-45E7-AB79-C88D7AF13E81}"/>
               </a:ext>
             </a:extLst>
           </p:cNvPr>
@@ -2867,8 +2842,8 @@
         </p:nvSpPr>
         <p:spPr>
           <a:xfrm xmlns:a="http://schemas.openxmlformats.org/drawingml/2006/main">
-            <a:off x="609600" y="333375"/>
-            <a:ext cx="10972800" cy="714375"/>
+            <a:off x="609600" y="323850"/>
+            <a:ext cx="10972800" cy="666750"/>
           </a:xfrm>
           <a:prstGeom xmlns:a="http://schemas.openxmlformats.org/drawingml/2006/main" prst="rect">
             <a:avLst/>
@@ -2885,23 +2860,23 @@
           <a:lstStyle xmlns:a="http://schemas.openxmlformats.org/drawingml/2006/main"/>
           <a:p xmlns:a="http://schemas.openxmlformats.org/drawingml/2006/main">
             <a:pPr>
-              <a:defRPr sz="4050" b="1">
+              <a:defRPr sz="3450" b="1">
                 <a:solidFill>
-                  <a:srgbClr val="242720"/>
+                  <a:srgbClr val="263C3A"/>
                 </a:solidFill>
-                <a:latin typeface="Arial"/>
-                <a:ea typeface="Arial"/>
-                <a:cs typeface="Arial"/>
+                <a:latin typeface="DejaVu Sans"/>
+                <a:ea typeface="DejaVu Sans"/>
+                <a:cs typeface="DejaVu Sans"/>
               </a:defRPr>
             </a:pPr>
             <a:r>
-              <a:rPr sz="4050" b="1">
+              <a:rPr sz="3450" b="1">
                 <a:solidFill>
-                  <a:srgbClr val="242720"/>
+                  <a:srgbClr val="263C3A"/>
                 </a:solidFill>
-                <a:latin typeface="Arial"/>
-                <a:ea typeface="Arial"/>
-                <a:cs typeface="Arial"/>
+                <a:latin typeface="DejaVu Sans"/>
+                <a:ea typeface="DejaVu Sans"/>
+                <a:cs typeface="DejaVu Sans"/>
               </a:rPr>
               <a:t>Cops and robbers</a:t>
             </a:r>
@@ -2913,7 +2888,7 @@
           <p:cNvPr id="2" name="">
             <a:extLst xmlns:a="http://schemas.openxmlformats.org/drawingml/2006/main">
               <a:ext uri="{FF2B5EF4-FFF2-40B4-BE49-F238E27FC236}">
-                <a16:creationId xmlns:a16="http://schemas.microsoft.com/office/drawing/2014/main" id="{98CE5828-A2C1-42AF-A53A-42A12DDD7A28}"/>
+                <a16:creationId xmlns:a16="http://schemas.microsoft.com/office/drawing/2014/main" id="{7A6E20FD-D046-40EB-88DE-391BE158994B}"/>
               </a:ext>
             </a:extLst>
           </p:cNvPr>
@@ -2924,8 +2899,8 @@
         </p:nvSpPr>
         <p:spPr>
           <a:xfrm xmlns:a="http://schemas.openxmlformats.org/drawingml/2006/main">
-            <a:off x="609600" y="1190625"/>
-            <a:ext cx="10972800" cy="476250"/>
+            <a:off x="609600" y="1085850"/>
+            <a:ext cx="10972800" cy="409575"/>
           </a:xfrm>
           <a:prstGeom xmlns:a="http://schemas.openxmlformats.org/drawingml/2006/main" prst="rect">
             <a:avLst/>
@@ -2942,25 +2917,25 @@
           <a:lstStyle xmlns:a="http://schemas.openxmlformats.org/drawingml/2006/main"/>
           <a:p xmlns:a="http://schemas.openxmlformats.org/drawingml/2006/main">
             <a:pPr>
-              <a:defRPr sz="2400" b="0">
+              <a:defRPr sz="2175" b="0">
                 <a:solidFill>
-                  <a:srgbClr val="242720"/>
+                  <a:srgbClr val="687572"/>
                 </a:solidFill>
-                <a:latin typeface="Arial"/>
-                <a:ea typeface="Arial"/>
-                <a:cs typeface="Arial"/>
+                <a:latin typeface="DejaVu Sans"/>
+                <a:ea typeface="DejaVu Sans"/>
+                <a:cs typeface="DejaVu Sans"/>
               </a:defRPr>
             </a:pPr>
             <a:r>
-              <a:rPr sz="2400" b="0">
+              <a:rPr sz="2175" b="0">
                 <a:solidFill>
-                  <a:srgbClr val="242720"/>
+                  <a:srgbClr val="687572"/>
                 </a:solidFill>
-                <a:latin typeface="Arial"/>
-                <a:ea typeface="Arial"/>
-                <a:cs typeface="Arial"/>
+                <a:latin typeface="DejaVu Sans"/>
+                <a:ea typeface="DejaVu Sans"/>
+                <a:cs typeface="DejaVu Sans"/>
               </a:rPr>
-              <a:t>[Add your topic or retrieval focus]</a:t>
+              <a:t>[Your topic or retrieval focus]</a:t>
             </a:r>
           </a:p>
         </p:txBody>
@@ -2970,7 +2945,7 @@
           <p:cNvPr id="3" name="">
             <a:extLst xmlns:a="http://schemas.openxmlformats.org/drawingml/2006/main">
               <a:ext uri="{FF2B5EF4-FFF2-40B4-BE49-F238E27FC236}">
-                <a16:creationId xmlns:a16="http://schemas.microsoft.com/office/drawing/2014/main" id="{1CA03050-4796-41B5-AFBF-7C4FD14D9795}"/>
+                <a16:creationId xmlns:a16="http://schemas.microsoft.com/office/drawing/2014/main" id="{C80E0647-016A-40FC-830E-83E9D49E9347}"/>
               </a:ext>
             </a:extLst>
           </p:cNvPr>
@@ -2981,8 +2956,38 @@
         </p:nvSpPr>
         <p:spPr>
           <a:xfrm xmlns:a="http://schemas.openxmlformats.org/drawingml/2006/main">
-            <a:off x="609600" y="1733550"/>
-            <a:ext cx="10972800" cy="400050"/>
+            <a:off x="609600" y="1676400"/>
+            <a:ext cx="10972800" cy="19050"/>
+          </a:xfrm>
+          <a:prstGeom xmlns:a="http://schemas.openxmlformats.org/drawingml/2006/main" prst="rect">
+            <a:avLst/>
+          </a:prstGeom>
+          <a:solidFill xmlns:a="http://schemas.openxmlformats.org/drawingml/2006/main">
+            <a:srgbClr val="A9BDB7"/>
+          </a:solidFill>
+          <a:ln xmlns:a="http://schemas.openxmlformats.org/drawingml/2006/main" w="0">
+            <a:noFill/>
+          </a:ln>
+        </p:spPr>
+      </p:sp>
+      <p:sp>
+        <p:nvSpPr>
+          <p:cNvPr id="4" name="">
+            <a:extLst xmlns:a="http://schemas.openxmlformats.org/drawingml/2006/main">
+              <a:ext uri="{FF2B5EF4-FFF2-40B4-BE49-F238E27FC236}">
+                <a16:creationId xmlns:a16="http://schemas.microsoft.com/office/drawing/2014/main" id="{D15C7C58-49C1-40C4-B2CB-845EA6361753}"/>
+              </a:ext>
+            </a:extLst>
+          </p:cNvPr>
+          <p:cNvSpPr>
+            <a:spLocks xmlns:a="http://schemas.openxmlformats.org/drawingml/2006/main" noGrp="1"/>
+          </p:cNvSpPr>
+          <p:nvPr/>
+        </p:nvSpPr>
+        <p:spPr>
+          <a:xfrm xmlns:a="http://schemas.openxmlformats.org/drawingml/2006/main">
+            <a:off x="609600" y="1828800"/>
+            <a:ext cx="4476750" cy="304800"/>
           </a:xfrm>
           <a:prstGeom xmlns:a="http://schemas.openxmlformats.org/drawingml/2006/main" prst="rect">
             <a:avLst/>
@@ -2999,35 +3004,35 @@
           <a:lstStyle xmlns:a="http://schemas.openxmlformats.org/drawingml/2006/main"/>
           <a:p xmlns:a="http://schemas.openxmlformats.org/drawingml/2006/main">
             <a:pPr>
-              <a:defRPr sz="1800" b="0">
+              <a:defRPr sz="1575" b="1">
                 <a:solidFill>
-                  <a:srgbClr val="28534A"/>
+                  <a:srgbClr val="263C3A"/>
                 </a:solidFill>
-                <a:latin typeface="Arial"/>
-                <a:ea typeface="Arial"/>
-                <a:cs typeface="Arial"/>
+                <a:latin typeface="DejaVu Sans"/>
+                <a:ea typeface="DejaVu Sans"/>
+                <a:cs typeface="DejaVu Sans"/>
               </a:defRPr>
             </a:pPr>
             <a:r>
-              <a:rPr sz="1800" b="0">
+              <a:rPr sz="1575" b="1">
                 <a:solidFill>
-                  <a:srgbClr val="28534A"/>
+                  <a:srgbClr val="263C3A"/>
                 </a:solidFill>
-                <a:latin typeface="Arial"/>
-                <a:ea typeface="Arial"/>
-                <a:cs typeface="Arial"/>
+                <a:latin typeface="DejaVu Sans"/>
+                <a:ea typeface="DejaVu Sans"/>
+                <a:cs typeface="DejaVu Sans"/>
               </a:rPr>
-              <a:t>Recall independently first. Check and improve after feedback.</a:t>
+              <a:t>01  Recall from memory</a:t>
             </a:r>
           </a:p>
         </p:txBody>
       </p:sp>
       <p:sp>
         <p:nvSpPr>
-          <p:cNvPr id="4" name="">
+          <p:cNvPr id="5" name="">
             <a:extLst xmlns:a="http://schemas.openxmlformats.org/drawingml/2006/main">
               <a:ext uri="{FF2B5EF4-FFF2-40B4-BE49-F238E27FC236}">
-                <a16:creationId xmlns:a16="http://schemas.microsoft.com/office/drawing/2014/main" id="{EAB7195C-6AE0-4682-82D5-E587911F2F91}"/>
+                <a16:creationId xmlns:a16="http://schemas.microsoft.com/office/drawing/2014/main" id="{93EDED62-6073-4BFB-86DA-5DBBA79FE51C}"/>
               </a:ext>
             </a:extLst>
           </p:cNvPr>
@@ -3038,172 +3043,8 @@
         </p:nvSpPr>
         <p:spPr>
           <a:xfrm xmlns:a="http://schemas.openxmlformats.org/drawingml/2006/main">
-            <a:off x="609600" y="2190750"/>
-            <a:ext cx="5400675" cy="3333750"/>
-          </a:xfrm>
-          <a:prstGeom xmlns:a="http://schemas.openxmlformats.org/drawingml/2006/main" prst="rect">
-            <a:avLst/>
-          </a:prstGeom>
-          <a:noFill xmlns:a="http://schemas.openxmlformats.org/drawingml/2006/main"/>
-          <a:ln xmlns:a="http://schemas.openxmlformats.org/drawingml/2006/main" w="9525">
-            <a:solidFill>
-              <a:srgbClr val="CBD0C4"/>
-            </a:solidFill>
-          </a:ln>
-        </p:spPr>
-        <p:txBody>
-          <a:bodyPr xmlns:a="http://schemas.openxmlformats.org/drawingml/2006/main" lIns="142875" tIns="114300" rIns="142875" bIns="0" anchor="t">
-            <a:noAutofit/>
-          </a:bodyPr>
-          <a:lstStyle xmlns:a="http://schemas.openxmlformats.org/drawingml/2006/main"/>
-          <a:p xmlns:a="http://schemas.openxmlformats.org/drawingml/2006/main">
-            <a:pPr>
-              <a:defRPr sz="1950" b="0">
-                <a:solidFill>
-                  <a:srgbClr val="42473D"/>
-                </a:solidFill>
-                <a:latin typeface="Arial"/>
-                <a:ea typeface="Arial"/>
-                <a:cs typeface="Arial"/>
-              </a:defRPr>
-            </a:pPr>
-            <a:r>
-              <a:rPr sz="1950" b="0">
-                <a:solidFill>
-                  <a:srgbClr val="42473D"/>
-                </a:solidFill>
-                <a:latin typeface="Arial"/>
-                <a:ea typeface="Arial"/>
-                <a:cs typeface="Arial"/>
-              </a:rPr>
-              <a:t>My recall</a:t>
-            </a:r>
-          </a:p>
-          <a:p xmlns:a="http://schemas.openxmlformats.org/drawingml/2006/main">
-            <a:pPr>
-              <a:defRPr sz="1950" b="0">
-                <a:solidFill>
-                  <a:srgbClr val="42473D"/>
-                </a:solidFill>
-                <a:latin typeface="Arial"/>
-                <a:ea typeface="Arial"/>
-                <a:cs typeface="Arial"/>
-              </a:defRPr>
-            </a:pPr>
-            <a:r>
-              <a:rPr sz="1950" b="0">
-                <a:solidFill>
-                  <a:srgbClr val="42473D"/>
-                </a:solidFill>
-                <a:latin typeface="Arial"/>
-                <a:ea typeface="Arial"/>
-                <a:cs typeface="Arial"/>
-              </a:rPr>
-              <a:t>[Add the independent recall focus]</a:t>
-            </a:r>
-          </a:p>
-        </p:txBody>
-      </p:sp>
-      <p:sp>
-        <p:nvSpPr>
-          <p:cNvPr id="5" name="">
-            <a:extLst xmlns:a="http://schemas.openxmlformats.org/drawingml/2006/main">
-              <a:ext uri="{FF2B5EF4-FFF2-40B4-BE49-F238E27FC236}">
-                <a16:creationId xmlns:a16="http://schemas.microsoft.com/office/drawing/2014/main" id="{677C9877-13D2-4E90-9822-18DDBA50F077}"/>
-              </a:ext>
-            </a:extLst>
-          </p:cNvPr>
-          <p:cNvSpPr>
-            <a:spLocks xmlns:a="http://schemas.openxmlformats.org/drawingml/2006/main" noGrp="1"/>
-          </p:cNvSpPr>
-          <p:nvPr/>
-        </p:nvSpPr>
-        <p:spPr>
-          <a:xfrm xmlns:a="http://schemas.openxmlformats.org/drawingml/2006/main">
-            <a:off x="6181725" y="2190750"/>
-            <a:ext cx="5400675" cy="3333750"/>
-          </a:xfrm>
-          <a:prstGeom xmlns:a="http://schemas.openxmlformats.org/drawingml/2006/main" prst="rect">
-            <a:avLst/>
-          </a:prstGeom>
-          <a:noFill xmlns:a="http://schemas.openxmlformats.org/drawingml/2006/main"/>
-          <a:ln xmlns:a="http://schemas.openxmlformats.org/drawingml/2006/main" w="9525">
-            <a:solidFill>
-              <a:srgbClr val="CBD0C4"/>
-            </a:solidFill>
-          </a:ln>
-        </p:spPr>
-        <p:txBody>
-          <a:bodyPr xmlns:a="http://schemas.openxmlformats.org/drawingml/2006/main" lIns="142875" tIns="114300" rIns="142875" bIns="0" anchor="t">
-            <a:noAutofit/>
-          </a:bodyPr>
-          <a:lstStyle xmlns:a="http://schemas.openxmlformats.org/drawingml/2006/main"/>
-          <a:p xmlns:a="http://schemas.openxmlformats.org/drawingml/2006/main">
-            <a:pPr>
-              <a:defRPr sz="1950" b="0">
-                <a:solidFill>
-                  <a:srgbClr val="42473D"/>
-                </a:solidFill>
-                <a:latin typeface="Arial"/>
-                <a:ea typeface="Arial"/>
-                <a:cs typeface="Arial"/>
-              </a:defRPr>
-            </a:pPr>
-            <a:r>
-              <a:rPr sz="1950" b="0">
-                <a:solidFill>
-                  <a:srgbClr val="42473D"/>
-                </a:solidFill>
-                <a:latin typeface="Arial"/>
-                <a:ea typeface="Arial"/>
-                <a:cs typeface="Arial"/>
-              </a:rPr>
-              <a:t>From peers</a:t>
-            </a:r>
-          </a:p>
-          <a:p xmlns:a="http://schemas.openxmlformats.org/drawingml/2006/main">
-            <a:pPr>
-              <a:defRPr sz="1950" b="0">
-                <a:solidFill>
-                  <a:srgbClr val="42473D"/>
-                </a:solidFill>
-                <a:latin typeface="Arial"/>
-                <a:ea typeface="Arial"/>
-                <a:cs typeface="Arial"/>
-              </a:defRPr>
-            </a:pPr>
-            <a:r>
-              <a:rPr sz="1950" b="0">
-                <a:solidFill>
-                  <a:srgbClr val="42473D"/>
-                </a:solidFill>
-                <a:latin typeface="Arial"/>
-                <a:ea typeface="Arial"/>
-                <a:cs typeface="Arial"/>
-              </a:rPr>
-              <a:t>[Add the sharing instructions]</a:t>
-            </a:r>
-          </a:p>
-        </p:txBody>
-      </p:sp>
-      <p:sp>
-        <p:nvSpPr>
-          <p:cNvPr id="6" name="">
-            <a:extLst xmlns:a="http://schemas.openxmlformats.org/drawingml/2006/main">
-              <a:ext uri="{FF2B5EF4-FFF2-40B4-BE49-F238E27FC236}">
-                <a16:creationId xmlns:a16="http://schemas.microsoft.com/office/drawing/2014/main" id="{A26D4263-0985-4E01-9F3C-2F46C842E5E8}"/>
-              </a:ext>
-            </a:extLst>
-          </p:cNvPr>
-          <p:cNvSpPr>
-            <a:spLocks xmlns:a="http://schemas.openxmlformats.org/drawingml/2006/main" noGrp="1"/>
-          </p:cNvSpPr>
-          <p:nvPr/>
-        </p:nvSpPr>
-        <p:spPr>
-          <a:xfrm xmlns:a="http://schemas.openxmlformats.org/drawingml/2006/main">
-            <a:off x="609600" y="5953125"/>
-            <a:ext cx="10972800" cy="381000"/>
+            <a:off x="6286500" y="1828800"/>
+            <a:ext cx="5048250" cy="304800"/>
           </a:xfrm>
           <a:prstGeom xmlns:a="http://schemas.openxmlformats.org/drawingml/2006/main" prst="rect">
             <a:avLst/>
@@ -3220,35 +3061,35 @@
           <a:lstStyle xmlns:a="http://schemas.openxmlformats.org/drawingml/2006/main"/>
           <a:p xmlns:a="http://schemas.openxmlformats.org/drawingml/2006/main">
             <a:pPr>
-              <a:defRPr sz="1800" b="0">
+              <a:defRPr sz="1575" b="1">
                 <a:solidFill>
-                  <a:srgbClr val="28534A"/>
+                  <a:srgbClr val="263C3A"/>
                 </a:solidFill>
-                <a:latin typeface="Arial"/>
-                <a:ea typeface="Arial"/>
-                <a:cs typeface="Arial"/>
+                <a:latin typeface="DejaVu Sans"/>
+                <a:ea typeface="DejaVu Sans"/>
+                <a:cs typeface="DejaVu Sans"/>
               </a:defRPr>
             </a:pPr>
             <a:r>
-              <a:rPr sz="1800" b="0">
+              <a:rPr sz="1575" b="1">
                 <a:solidFill>
-                  <a:srgbClr val="28534A"/>
+                  <a:srgbClr val="263C3A"/>
                 </a:solidFill>
-                <a:latin typeface="Arial"/>
-                <a:ea typeface="Arial"/>
-                <a:cs typeface="Arial"/>
+                <a:latin typeface="DejaVu Sans"/>
+                <a:ea typeface="DejaVu Sans"/>
+                <a:cs typeface="DejaVu Sans"/>
               </a:rPr>
-              <a:t>Time: [Add minutes]     Check: [Add your feedback routine]</a:t>
+              <a:t>02  Check and improve</a:t>
             </a:r>
           </a:p>
         </p:txBody>
       </p:sp>
       <p:sp>
         <p:nvSpPr>
-          <p:cNvPr id="7" name="">
+          <p:cNvPr id="6" name="">
             <a:extLst xmlns:a="http://schemas.openxmlformats.org/drawingml/2006/main">
               <a:ext uri="{FF2B5EF4-FFF2-40B4-BE49-F238E27FC236}">
-                <a16:creationId xmlns:a16="http://schemas.microsoft.com/office/drawing/2014/main" id="{6B68BEB2-927B-45EC-8ACC-0B6AD9952272}"/>
+                <a16:creationId xmlns:a16="http://schemas.microsoft.com/office/drawing/2014/main" id="{39D3743D-7B91-4453-B53E-6B4E1EC3CF80}"/>
               </a:ext>
             </a:extLst>
           </p:cNvPr>
@@ -3259,8 +3100,70 @@
         </p:nvSpPr>
         <p:spPr>
           <a:xfrm xmlns:a="http://schemas.openxmlformats.org/drawingml/2006/main">
-            <a:off x="609600" y="6534150"/>
-            <a:ext cx="10972800" cy="209550"/>
+            <a:off x="609600" y="2247900"/>
+            <a:ext cx="5400675" cy="3371850"/>
+          </a:xfrm>
+          <a:prstGeom xmlns:a="http://schemas.openxmlformats.org/drawingml/2006/main" prst="rect">
+            <a:avLst/>
+          </a:prstGeom>
+          <a:solidFill xmlns:a="http://schemas.openxmlformats.org/drawingml/2006/main">
+            <a:srgbClr val="EDF2F5"/>
+          </a:solidFill>
+          <a:ln xmlns:a="http://schemas.openxmlformats.org/drawingml/2006/main" w="9525">
+            <a:solidFill>
+              <a:srgbClr val="D4DFDB"/>
+            </a:solidFill>
+          </a:ln>
+        </p:spPr>
+      </p:sp>
+      <p:sp>
+        <p:nvSpPr>
+          <p:cNvPr id="7" name="">
+            <a:extLst xmlns:a="http://schemas.openxmlformats.org/drawingml/2006/main">
+              <a:ext uri="{FF2B5EF4-FFF2-40B4-BE49-F238E27FC236}">
+                <a16:creationId xmlns:a16="http://schemas.microsoft.com/office/drawing/2014/main" id="{8691EE1E-0E2C-4422-94AE-73AC67432B6F}"/>
+              </a:ext>
+            </a:extLst>
+          </p:cNvPr>
+          <p:cNvSpPr>
+            <a:spLocks xmlns:a="http://schemas.openxmlformats.org/drawingml/2006/main" noGrp="1"/>
+          </p:cNvSpPr>
+          <p:nvPr/>
+        </p:nvSpPr>
+        <p:spPr>
+          <a:xfrm xmlns:a="http://schemas.openxmlformats.org/drawingml/2006/main">
+            <a:off x="800100" y="2419350"/>
+            <a:ext cx="381000" cy="381000"/>
+          </a:xfrm>
+          <a:prstGeom xmlns:a="http://schemas.openxmlformats.org/drawingml/2006/main" prst="ellipse">
+            <a:avLst/>
+          </a:prstGeom>
+          <a:solidFill xmlns:a="http://schemas.openxmlformats.org/drawingml/2006/main">
+            <a:srgbClr val="FFFFFF"/>
+          </a:solidFill>
+          <a:ln xmlns:a="http://schemas.openxmlformats.org/drawingml/2006/main" w="0">
+            <a:noFill/>
+          </a:ln>
+        </p:spPr>
+      </p:sp>
+      <p:sp>
+        <p:nvSpPr>
+          <p:cNvPr id="8" name="">
+            <a:extLst xmlns:a="http://schemas.openxmlformats.org/drawingml/2006/main">
+              <a:ext uri="{FF2B5EF4-FFF2-40B4-BE49-F238E27FC236}">
+                <a16:creationId xmlns:a16="http://schemas.microsoft.com/office/drawing/2014/main" id="{616DC23A-A414-453F-BE5F-3FC1B5E5171B}"/>
+              </a:ext>
+            </a:extLst>
+          </p:cNvPr>
+          <p:cNvSpPr>
+            <a:spLocks xmlns:a="http://schemas.openxmlformats.org/drawingml/2006/main" noGrp="1"/>
+          </p:cNvSpPr>
+          <p:nvPr/>
+        </p:nvSpPr>
+        <p:spPr>
+          <a:xfrm xmlns:a="http://schemas.openxmlformats.org/drawingml/2006/main">
+            <a:off x="857250" y="2486025"/>
+            <a:ext cx="342900" cy="285750"/>
           </a:xfrm>
           <a:prstGeom xmlns:a="http://schemas.openxmlformats.org/drawingml/2006/main" prst="rect">
             <a:avLst/>
@@ -3277,33 +3180,524 @@
           <a:lstStyle xmlns:a="http://schemas.openxmlformats.org/drawingml/2006/main"/>
           <a:p xmlns:a="http://schemas.openxmlformats.org/drawingml/2006/main">
             <a:pPr>
-              <a:defRPr sz="1050" b="0">
+              <a:defRPr sz="1350" b="1">
                 <a:solidFill>
-                  <a:srgbClr val="62675C"/>
+                  <a:srgbClr val="263C3A"/>
                 </a:solidFill>
-                <a:latin typeface="Arial"/>
-                <a:ea typeface="Arial"/>
-                <a:cs typeface="Arial"/>
+                <a:latin typeface="DejaVu Sans"/>
+                <a:ea typeface="DejaVu Sans"/>
+                <a:cs typeface="DejaVu Sans"/>
               </a:defRPr>
             </a:pPr>
             <a:r>
-              <a:rPr sz="1050" b="0">
+              <a:rPr sz="1350" b="1">
                 <a:solidFill>
-                  <a:srgbClr val="62675C"/>
+                  <a:srgbClr val="263C3A"/>
                 </a:solidFill>
-                <a:latin typeface="Arial"/>
-                <a:ea typeface="Arial"/>
-                <a:cs typeface="Arial"/>
+                <a:latin typeface="DejaVu Sans"/>
+                <a:ea typeface="DejaVu Sans"/>
+                <a:cs typeface="DejaVu Sans"/>
               </a:rPr>
-              <a:t>TNT Teaching Tools   Editable classroom template   Source and teacher guidance in speaker notes</a:t>
+              <a:t>01</a:t>
             </a:r>
           </a:p>
         </p:txBody>
       </p:sp>
+      <p:sp>
+        <p:nvSpPr>
+          <p:cNvPr id="9" name="">
+            <a:extLst xmlns:a="http://schemas.openxmlformats.org/drawingml/2006/main">
+              <a:ext uri="{FF2B5EF4-FFF2-40B4-BE49-F238E27FC236}">
+                <a16:creationId xmlns:a16="http://schemas.microsoft.com/office/drawing/2014/main" id="{8EA1CCE5-15DE-436E-B97E-15070859714E}"/>
+              </a:ext>
+            </a:extLst>
+          </p:cNvPr>
+          <p:cNvSpPr>
+            <a:spLocks xmlns:a="http://schemas.openxmlformats.org/drawingml/2006/main" noGrp="1"/>
+          </p:cNvSpPr>
+          <p:nvPr/>
+        </p:nvSpPr>
+        <p:spPr>
+          <a:xfrm xmlns:a="http://schemas.openxmlformats.org/drawingml/2006/main">
+            <a:off x="1352550" y="2466975"/>
+            <a:ext cx="4467225" cy="428625"/>
+          </a:xfrm>
+          <a:prstGeom xmlns:a="http://schemas.openxmlformats.org/drawingml/2006/main" prst="rect">
+            <a:avLst/>
+          </a:prstGeom>
+          <a:noFill xmlns:a="http://schemas.openxmlformats.org/drawingml/2006/main"/>
+          <a:ln xmlns:a="http://schemas.openxmlformats.org/drawingml/2006/main" w="0">
+            <a:noFill/>
+          </a:ln>
+        </p:spPr>
+        <p:txBody>
+          <a:bodyPr xmlns:a="http://schemas.openxmlformats.org/drawingml/2006/main" lIns="0" tIns="0" rIns="0" bIns="0" anchor="t">
+            <a:noAutofit/>
+          </a:bodyPr>
+          <a:lstStyle xmlns:a="http://schemas.openxmlformats.org/drawingml/2006/main"/>
+          <a:p xmlns:a="http://schemas.openxmlformats.org/drawingml/2006/main">
+            <a:pPr>
+              <a:defRPr sz="1725" b="1">
+                <a:solidFill>
+                  <a:srgbClr val="263C3A"/>
+                </a:solidFill>
+                <a:latin typeface="DejaVu Sans"/>
+                <a:ea typeface="DejaVu Sans"/>
+                <a:cs typeface="DejaVu Sans"/>
+              </a:defRPr>
+            </a:pPr>
+            <a:r>
+              <a:rPr sz="1725" b="1">
+                <a:solidFill>
+                  <a:srgbClr val="263C3A"/>
+                </a:solidFill>
+                <a:latin typeface="DejaVu Sans"/>
+                <a:ea typeface="DejaVu Sans"/>
+                <a:cs typeface="DejaVu Sans"/>
+              </a:rPr>
+              <a:t>My recall</a:t>
+            </a:r>
+          </a:p>
+        </p:txBody>
+      </p:sp>
+      <p:sp>
+        <p:nvSpPr>
+          <p:cNvPr id="10" name="">
+            <a:extLst xmlns:a="http://schemas.openxmlformats.org/drawingml/2006/main">
+              <a:ext uri="{FF2B5EF4-FFF2-40B4-BE49-F238E27FC236}">
+                <a16:creationId xmlns:a16="http://schemas.microsoft.com/office/drawing/2014/main" id="{423FFA03-3BD9-46F9-A796-04C0D39C2A44}"/>
+              </a:ext>
+            </a:extLst>
+          </p:cNvPr>
+          <p:cNvSpPr>
+            <a:spLocks xmlns:a="http://schemas.openxmlformats.org/drawingml/2006/main" noGrp="1"/>
+          </p:cNvSpPr>
+          <p:nvPr/>
+        </p:nvSpPr>
+        <p:spPr>
+          <a:xfrm xmlns:a="http://schemas.openxmlformats.org/drawingml/2006/main">
+            <a:off x="819150" y="2990850"/>
+            <a:ext cx="4981575" cy="2466975"/>
+          </a:xfrm>
+          <a:prstGeom xmlns:a="http://schemas.openxmlformats.org/drawingml/2006/main" prst="rect">
+            <a:avLst/>
+          </a:prstGeom>
+          <a:noFill xmlns:a="http://schemas.openxmlformats.org/drawingml/2006/main"/>
+          <a:ln xmlns:a="http://schemas.openxmlformats.org/drawingml/2006/main" w="0">
+            <a:noFill/>
+          </a:ln>
+        </p:spPr>
+        <p:txBody>
+          <a:bodyPr xmlns:a="http://schemas.openxmlformats.org/drawingml/2006/main" lIns="0" tIns="0" rIns="0" bIns="0" anchor="t">
+            <a:noAutofit/>
+          </a:bodyPr>
+          <a:lstStyle xmlns:a="http://schemas.openxmlformats.org/drawingml/2006/main"/>
+          <a:p xmlns:a="http://schemas.openxmlformats.org/drawingml/2006/main">
+            <a:pPr>
+              <a:defRPr sz="1950" b="0">
+                <a:solidFill>
+                  <a:srgbClr val="687572"/>
+                </a:solidFill>
+                <a:latin typeface="DejaVu Sans"/>
+                <a:ea typeface="DejaVu Sans"/>
+                <a:cs typeface="DejaVu Sans"/>
+              </a:defRPr>
+            </a:pPr>
+            <a:r>
+              <a:rPr sz="1950" b="0">
+                <a:solidFill>
+                  <a:srgbClr val="687572"/>
+                </a:solidFill>
+                <a:latin typeface="DejaVu Sans"/>
+                <a:ea typeface="DejaVu Sans"/>
+                <a:cs typeface="DejaVu Sans"/>
+              </a:rPr>
+              <a:t>[Your independent recall focus]</a:t>
+            </a:r>
+          </a:p>
+        </p:txBody>
+      </p:sp>
+      <p:sp>
+        <p:nvSpPr>
+          <p:cNvPr id="11" name="">
+            <a:extLst xmlns:a="http://schemas.openxmlformats.org/drawingml/2006/main">
+              <a:ext uri="{FF2B5EF4-FFF2-40B4-BE49-F238E27FC236}">
+                <a16:creationId xmlns:a16="http://schemas.microsoft.com/office/drawing/2014/main" id="{A4DADA6D-F470-4FD1-B501-0D39E750ED4D}"/>
+              </a:ext>
+            </a:extLst>
+          </p:cNvPr>
+          <p:cNvSpPr>
+            <a:spLocks xmlns:a="http://schemas.openxmlformats.org/drawingml/2006/main" noGrp="1"/>
+          </p:cNvSpPr>
+          <p:nvPr/>
+        </p:nvSpPr>
+        <p:spPr>
+          <a:xfrm xmlns:a="http://schemas.openxmlformats.org/drawingml/2006/main">
+            <a:off x="6181725" y="2247900"/>
+            <a:ext cx="5400675" cy="3371850"/>
+          </a:xfrm>
+          <a:prstGeom xmlns:a="http://schemas.openxmlformats.org/drawingml/2006/main" prst="rect">
+            <a:avLst/>
+          </a:prstGeom>
+          <a:solidFill xmlns:a="http://schemas.openxmlformats.org/drawingml/2006/main">
+            <a:srgbClr val="EAF1EC"/>
+          </a:solidFill>
+          <a:ln xmlns:a="http://schemas.openxmlformats.org/drawingml/2006/main" w="9525">
+            <a:solidFill>
+              <a:srgbClr val="D4DFDB"/>
+            </a:solidFill>
+          </a:ln>
+        </p:spPr>
+      </p:sp>
+      <p:sp>
+        <p:nvSpPr>
+          <p:cNvPr id="12" name="">
+            <a:extLst xmlns:a="http://schemas.openxmlformats.org/drawingml/2006/main">
+              <a:ext uri="{FF2B5EF4-FFF2-40B4-BE49-F238E27FC236}">
+                <a16:creationId xmlns:a16="http://schemas.microsoft.com/office/drawing/2014/main" id="{539DAF0B-6C7E-4806-9835-DAE4159BBB91}"/>
+              </a:ext>
+            </a:extLst>
+          </p:cNvPr>
+          <p:cNvSpPr>
+            <a:spLocks xmlns:a="http://schemas.openxmlformats.org/drawingml/2006/main" noGrp="1"/>
+          </p:cNvSpPr>
+          <p:nvPr/>
+        </p:nvSpPr>
+        <p:spPr>
+          <a:xfrm xmlns:a="http://schemas.openxmlformats.org/drawingml/2006/main">
+            <a:off x="6372225" y="2419350"/>
+            <a:ext cx="381000" cy="381000"/>
+          </a:xfrm>
+          <a:prstGeom xmlns:a="http://schemas.openxmlformats.org/drawingml/2006/main" prst="ellipse">
+            <a:avLst/>
+          </a:prstGeom>
+          <a:solidFill xmlns:a="http://schemas.openxmlformats.org/drawingml/2006/main">
+            <a:srgbClr val="FFFFFF"/>
+          </a:solidFill>
+          <a:ln xmlns:a="http://schemas.openxmlformats.org/drawingml/2006/main" w="0">
+            <a:noFill/>
+          </a:ln>
+        </p:spPr>
+      </p:sp>
+      <p:sp>
+        <p:nvSpPr>
+          <p:cNvPr id="13" name="">
+            <a:extLst xmlns:a="http://schemas.openxmlformats.org/drawingml/2006/main">
+              <a:ext uri="{FF2B5EF4-FFF2-40B4-BE49-F238E27FC236}">
+                <a16:creationId xmlns:a16="http://schemas.microsoft.com/office/drawing/2014/main" id="{7100852E-AE30-4FCA-96CC-7C3933DC2233}"/>
+              </a:ext>
+            </a:extLst>
+          </p:cNvPr>
+          <p:cNvSpPr>
+            <a:spLocks xmlns:a="http://schemas.openxmlformats.org/drawingml/2006/main" noGrp="1"/>
+          </p:cNvSpPr>
+          <p:nvPr/>
+        </p:nvSpPr>
+        <p:spPr>
+          <a:xfrm xmlns:a="http://schemas.openxmlformats.org/drawingml/2006/main">
+            <a:off x="6429375" y="2486025"/>
+            <a:ext cx="342900" cy="285750"/>
+          </a:xfrm>
+          <a:prstGeom xmlns:a="http://schemas.openxmlformats.org/drawingml/2006/main" prst="rect">
+            <a:avLst/>
+          </a:prstGeom>
+          <a:noFill xmlns:a="http://schemas.openxmlformats.org/drawingml/2006/main"/>
+          <a:ln xmlns:a="http://schemas.openxmlformats.org/drawingml/2006/main" w="0">
+            <a:noFill/>
+          </a:ln>
+        </p:spPr>
+        <p:txBody>
+          <a:bodyPr xmlns:a="http://schemas.openxmlformats.org/drawingml/2006/main" lIns="0" tIns="0" rIns="0" bIns="0" anchor="t">
+            <a:noAutofit/>
+          </a:bodyPr>
+          <a:lstStyle xmlns:a="http://schemas.openxmlformats.org/drawingml/2006/main"/>
+          <a:p xmlns:a="http://schemas.openxmlformats.org/drawingml/2006/main">
+            <a:pPr>
+              <a:defRPr sz="1350" b="1">
+                <a:solidFill>
+                  <a:srgbClr val="263C3A"/>
+                </a:solidFill>
+                <a:latin typeface="DejaVu Sans"/>
+                <a:ea typeface="DejaVu Sans"/>
+                <a:cs typeface="DejaVu Sans"/>
+              </a:defRPr>
+            </a:pPr>
+            <a:r>
+              <a:rPr sz="1350" b="1">
+                <a:solidFill>
+                  <a:srgbClr val="263C3A"/>
+                </a:solidFill>
+                <a:latin typeface="DejaVu Sans"/>
+                <a:ea typeface="DejaVu Sans"/>
+                <a:cs typeface="DejaVu Sans"/>
+              </a:rPr>
+              <a:t>02</a:t>
+            </a:r>
+          </a:p>
+        </p:txBody>
+      </p:sp>
+      <p:sp>
+        <p:nvSpPr>
+          <p:cNvPr id="14" name="">
+            <a:extLst xmlns:a="http://schemas.openxmlformats.org/drawingml/2006/main">
+              <a:ext uri="{FF2B5EF4-FFF2-40B4-BE49-F238E27FC236}">
+                <a16:creationId xmlns:a16="http://schemas.microsoft.com/office/drawing/2014/main" id="{14B8900D-7A6E-4A96-B563-16046ACCE04F}"/>
+              </a:ext>
+            </a:extLst>
+          </p:cNvPr>
+          <p:cNvSpPr>
+            <a:spLocks xmlns:a="http://schemas.openxmlformats.org/drawingml/2006/main" noGrp="1"/>
+          </p:cNvSpPr>
+          <p:nvPr/>
+        </p:nvSpPr>
+        <p:spPr>
+          <a:xfrm xmlns:a="http://schemas.openxmlformats.org/drawingml/2006/main">
+            <a:off x="6924675" y="2466975"/>
+            <a:ext cx="4467225" cy="428625"/>
+          </a:xfrm>
+          <a:prstGeom xmlns:a="http://schemas.openxmlformats.org/drawingml/2006/main" prst="rect">
+            <a:avLst/>
+          </a:prstGeom>
+          <a:noFill xmlns:a="http://schemas.openxmlformats.org/drawingml/2006/main"/>
+          <a:ln xmlns:a="http://schemas.openxmlformats.org/drawingml/2006/main" w="0">
+            <a:noFill/>
+          </a:ln>
+        </p:spPr>
+        <p:txBody>
+          <a:bodyPr xmlns:a="http://schemas.openxmlformats.org/drawingml/2006/main" lIns="0" tIns="0" rIns="0" bIns="0" anchor="t">
+            <a:noAutofit/>
+          </a:bodyPr>
+          <a:lstStyle xmlns:a="http://schemas.openxmlformats.org/drawingml/2006/main"/>
+          <a:p xmlns:a="http://schemas.openxmlformats.org/drawingml/2006/main">
+            <a:pPr>
+              <a:defRPr sz="1725" b="1">
+                <a:solidFill>
+                  <a:srgbClr val="263C3A"/>
+                </a:solidFill>
+                <a:latin typeface="DejaVu Sans"/>
+                <a:ea typeface="DejaVu Sans"/>
+                <a:cs typeface="DejaVu Sans"/>
+              </a:defRPr>
+            </a:pPr>
+            <a:r>
+              <a:rPr sz="1725" b="1">
+                <a:solidFill>
+                  <a:srgbClr val="263C3A"/>
+                </a:solidFill>
+                <a:latin typeface="DejaVu Sans"/>
+                <a:ea typeface="DejaVu Sans"/>
+                <a:cs typeface="DejaVu Sans"/>
+              </a:rPr>
+              <a:t>From peers</a:t>
+            </a:r>
+          </a:p>
+        </p:txBody>
+      </p:sp>
+      <p:sp>
+        <p:nvSpPr>
+          <p:cNvPr id="15" name="">
+            <a:extLst xmlns:a="http://schemas.openxmlformats.org/drawingml/2006/main">
+              <a:ext uri="{FF2B5EF4-FFF2-40B4-BE49-F238E27FC236}">
+                <a16:creationId xmlns:a16="http://schemas.microsoft.com/office/drawing/2014/main" id="{07263879-797B-42B7-A1C1-92BE639236D8}"/>
+              </a:ext>
+            </a:extLst>
+          </p:cNvPr>
+          <p:cNvSpPr>
+            <a:spLocks xmlns:a="http://schemas.openxmlformats.org/drawingml/2006/main" noGrp="1"/>
+          </p:cNvSpPr>
+          <p:nvPr/>
+        </p:nvSpPr>
+        <p:spPr>
+          <a:xfrm xmlns:a="http://schemas.openxmlformats.org/drawingml/2006/main">
+            <a:off x="6391275" y="2990850"/>
+            <a:ext cx="4981575" cy="2466975"/>
+          </a:xfrm>
+          <a:prstGeom xmlns:a="http://schemas.openxmlformats.org/drawingml/2006/main" prst="rect">
+            <a:avLst/>
+          </a:prstGeom>
+          <a:noFill xmlns:a="http://schemas.openxmlformats.org/drawingml/2006/main"/>
+          <a:ln xmlns:a="http://schemas.openxmlformats.org/drawingml/2006/main" w="0">
+            <a:noFill/>
+          </a:ln>
+        </p:spPr>
+        <p:txBody>
+          <a:bodyPr xmlns:a="http://schemas.openxmlformats.org/drawingml/2006/main" lIns="0" tIns="0" rIns="0" bIns="0" anchor="t">
+            <a:noAutofit/>
+          </a:bodyPr>
+          <a:lstStyle xmlns:a="http://schemas.openxmlformats.org/drawingml/2006/main"/>
+          <a:p xmlns:a="http://schemas.openxmlformats.org/drawingml/2006/main">
+            <a:pPr>
+              <a:defRPr sz="1950" b="0">
+                <a:solidFill>
+                  <a:srgbClr val="687572"/>
+                </a:solidFill>
+                <a:latin typeface="DejaVu Sans"/>
+                <a:ea typeface="DejaVu Sans"/>
+                <a:cs typeface="DejaVu Sans"/>
+              </a:defRPr>
+            </a:pPr>
+            <a:r>
+              <a:rPr sz="1950" b="0">
+                <a:solidFill>
+                  <a:srgbClr val="687572"/>
+                </a:solidFill>
+                <a:latin typeface="DejaVu Sans"/>
+                <a:ea typeface="DejaVu Sans"/>
+                <a:cs typeface="DejaVu Sans"/>
+              </a:rPr>
+              <a:t>[Your sharing instructions]</a:t>
+            </a:r>
+          </a:p>
+        </p:txBody>
+      </p:sp>
+      <p:sp>
+        <p:nvSpPr>
+          <p:cNvPr id="16" name="">
+            <a:extLst xmlns:a="http://schemas.openxmlformats.org/drawingml/2006/main">
+              <a:ext uri="{FF2B5EF4-FFF2-40B4-BE49-F238E27FC236}">
+                <a16:creationId xmlns:a16="http://schemas.microsoft.com/office/drawing/2014/main" id="{1BD79B45-9111-4B38-B81E-6135E1D1F71B}"/>
+              </a:ext>
+            </a:extLst>
+          </p:cNvPr>
+          <p:cNvSpPr>
+            <a:spLocks xmlns:a="http://schemas.openxmlformats.org/drawingml/2006/main" noGrp="1"/>
+          </p:cNvSpPr>
+          <p:nvPr/>
+        </p:nvSpPr>
+        <p:spPr>
+          <a:xfrm xmlns:a="http://schemas.openxmlformats.org/drawingml/2006/main">
+            <a:off x="609600" y="5953125"/>
+            <a:ext cx="10972800" cy="9525"/>
+          </a:xfrm>
+          <a:prstGeom xmlns:a="http://schemas.openxmlformats.org/drawingml/2006/main" prst="rect">
+            <a:avLst/>
+          </a:prstGeom>
+          <a:solidFill xmlns:a="http://schemas.openxmlformats.org/drawingml/2006/main">
+            <a:srgbClr val="A9BDB7"/>
+          </a:solidFill>
+          <a:ln xmlns:a="http://schemas.openxmlformats.org/drawingml/2006/main" w="0">
+            <a:noFill/>
+          </a:ln>
+        </p:spPr>
+      </p:sp>
+      <p:sp>
+        <p:nvSpPr>
+          <p:cNvPr id="17" name="">
+            <a:extLst xmlns:a="http://schemas.openxmlformats.org/drawingml/2006/main">
+              <a:ext uri="{FF2B5EF4-FFF2-40B4-BE49-F238E27FC236}">
+                <a16:creationId xmlns:a16="http://schemas.microsoft.com/office/drawing/2014/main" id="{7189A996-EB53-4F8A-B5C0-A48406019E75}"/>
+              </a:ext>
+            </a:extLst>
+          </p:cNvPr>
+          <p:cNvSpPr>
+            <a:spLocks xmlns:a="http://schemas.openxmlformats.org/drawingml/2006/main" noGrp="1"/>
+          </p:cNvSpPr>
+          <p:nvPr/>
+        </p:nvSpPr>
+        <p:spPr>
+          <a:xfrm xmlns:a="http://schemas.openxmlformats.org/drawingml/2006/main">
+            <a:off x="609600" y="6191250"/>
+            <a:ext cx="3238500" cy="361950"/>
+          </a:xfrm>
+          <a:prstGeom xmlns:a="http://schemas.openxmlformats.org/drawingml/2006/main" prst="rect">
+            <a:avLst/>
+          </a:prstGeom>
+          <a:noFill xmlns:a="http://schemas.openxmlformats.org/drawingml/2006/main"/>
+          <a:ln xmlns:a="http://schemas.openxmlformats.org/drawingml/2006/main" w="0">
+            <a:noFill/>
+          </a:ln>
+        </p:spPr>
+        <p:txBody>
+          <a:bodyPr xmlns:a="http://schemas.openxmlformats.org/drawingml/2006/main" lIns="0" tIns="0" rIns="0" bIns="0" anchor="t">
+            <a:noAutofit/>
+          </a:bodyPr>
+          <a:lstStyle xmlns:a="http://schemas.openxmlformats.org/drawingml/2006/main"/>
+          <a:p xmlns:a="http://schemas.openxmlformats.org/drawingml/2006/main">
+            <a:pPr>
+              <a:defRPr sz="1650" b="0">
+                <a:solidFill>
+                  <a:srgbClr val="687572"/>
+                </a:solidFill>
+                <a:latin typeface="DejaVu Sans"/>
+                <a:ea typeface="DejaVu Sans"/>
+                <a:cs typeface="DejaVu Sans"/>
+              </a:defRPr>
+            </a:pPr>
+            <a:r>
+              <a:rPr sz="1650" b="0">
+                <a:solidFill>
+                  <a:srgbClr val="687572"/>
+                </a:solidFill>
+                <a:latin typeface="DejaVu Sans"/>
+                <a:ea typeface="DejaVu Sans"/>
+                <a:cs typeface="DejaVu Sans"/>
+              </a:rPr>
+              <a:t>Time: [Minutes]</a:t>
+            </a:r>
+          </a:p>
+        </p:txBody>
+      </p:sp>
+      <p:sp>
+        <p:nvSpPr>
+          <p:cNvPr id="18" name="">
+            <a:extLst xmlns:a="http://schemas.openxmlformats.org/drawingml/2006/main">
+              <a:ext uri="{FF2B5EF4-FFF2-40B4-BE49-F238E27FC236}">
+                <a16:creationId xmlns:a16="http://schemas.microsoft.com/office/drawing/2014/main" id="{EF5882EC-A307-465E-AE43-9CD034ACC125}"/>
+              </a:ext>
+            </a:extLst>
+          </p:cNvPr>
+          <p:cNvSpPr>
+            <a:spLocks xmlns:a="http://schemas.openxmlformats.org/drawingml/2006/main" noGrp="1"/>
+          </p:cNvSpPr>
+          <p:nvPr/>
+        </p:nvSpPr>
+        <p:spPr>
+          <a:xfrm xmlns:a="http://schemas.openxmlformats.org/drawingml/2006/main">
+            <a:off x="4286250" y="6191250"/>
+            <a:ext cx="7296150" cy="361950"/>
+          </a:xfrm>
+          <a:prstGeom xmlns:a="http://schemas.openxmlformats.org/drawingml/2006/main" prst="rect">
+            <a:avLst/>
+          </a:prstGeom>
+          <a:noFill xmlns:a="http://schemas.openxmlformats.org/drawingml/2006/main"/>
+          <a:ln xmlns:a="http://schemas.openxmlformats.org/drawingml/2006/main" w="0">
+            <a:noFill/>
+          </a:ln>
+        </p:spPr>
+        <p:txBody>
+          <a:bodyPr xmlns:a="http://schemas.openxmlformats.org/drawingml/2006/main" lIns="0" tIns="0" rIns="0" bIns="0" anchor="t">
+            <a:noAutofit/>
+          </a:bodyPr>
+          <a:lstStyle xmlns:a="http://schemas.openxmlformats.org/drawingml/2006/main"/>
+          <a:p xmlns:a="http://schemas.openxmlformats.org/drawingml/2006/main">
+            <a:pPr>
+              <a:defRPr sz="1650" b="0">
+                <a:solidFill>
+                  <a:srgbClr val="687572"/>
+                </a:solidFill>
+                <a:latin typeface="DejaVu Sans"/>
+                <a:ea typeface="DejaVu Sans"/>
+                <a:cs typeface="DejaVu Sans"/>
+              </a:defRPr>
+            </a:pPr>
+            <a:r>
+              <a:rPr sz="1650" b="0">
+                <a:solidFill>
+                  <a:srgbClr val="687572"/>
+                </a:solidFill>
+                <a:latin typeface="DejaVu Sans"/>
+                <a:ea typeface="DejaVu Sans"/>
+                <a:cs typeface="DejaVu Sans"/>
+              </a:rPr>
+              <a:t>Feedback: [Your checking routine]</a:t>
+            </a:r>
+          </a:p>
+        </p:txBody>
+      </p:sp>
     </p:spTree>
     <p:extLst>
       <p:ext uri="{BB962C8B-B14F-4D97-AF65-F5344CB8AC3E}">
-        <p14:creationId xmlns:p14="http://schemas.microsoft.com/office/powerpoint/2010/main" val="785586904"/>
+        <p14:creationId xmlns:p14="http://schemas.microsoft.com/office/powerpoint/2010/main" val="1938392944"/>
       </p:ext>
     </p:extLst>
   </p:cSld>
